--- a/docs/state-machine.pptx
+++ b/docs/state-machine.pptx
@@ -21,6 +21,7 @@
     <p:sldId id="269" r:id="rId20"/>
     <p:sldId id="270" r:id="rId21"/>
     <p:sldId id="271" r:id="rId22"/>
+    <p:sldId id="272" r:id="rId23"/>
   </p:sldIdLst>
   <p:sldSz cx="12191695" cy="6858000" type="screen4x3"/>
   <p:notesSz cx="6858000" cy="9144000"/>
@@ -3357,7 +3358,7 @@
                 </a:solidFill>
                 <a:latin typeface="Consolas"/>
               </a:rPr>
-              <a:t>01 / 16</a:t>
+              <a:t>01 / 17</a:t>
             </a:r>
           </a:p>
         </p:txBody>
@@ -3760,7 +3761,7 @@
                 </a:solidFill>
                 <a:latin typeface="Consolas"/>
               </a:rPr>
-              <a:t>10 / 16</a:t>
+              <a:t>10 / 17</a:t>
             </a:r>
           </a:p>
         </p:txBody>
@@ -4244,7 +4245,7 @@
                 </a:solidFill>
                 <a:latin typeface="Consolas"/>
               </a:rPr>
-              <a:t>11 / 16</a:t>
+              <a:t>11 / 17</a:t>
             </a:r>
           </a:p>
         </p:txBody>
@@ -4554,7 +4555,7 @@
                 </a:solidFill>
                 <a:latin typeface="Consolas"/>
               </a:rPr>
-              <a:t>12 / 16</a:t>
+              <a:t>12 / 17</a:t>
             </a:r>
           </a:p>
         </p:txBody>
@@ -5498,6 +5499,407 @@
 </file>
 
 <file path=ppt/slides/slide13.xml><?xml version="1.0" encoding="utf-8"?>
+<p:sld xmlns:a="http://schemas.openxmlformats.org/drawingml/2006/main" xmlns:p="http://schemas.openxmlformats.org/presentationml/2006/main" xmlns:r="http://schemas.openxmlformats.org/officeDocument/2006/relationships">
+  <p:cSld>
+    <p:spTree>
+      <p:nvGrpSpPr>
+        <p:cNvPr id="1" name=""/>
+        <p:cNvGrpSpPr/>
+        <p:nvPr/>
+      </p:nvGrpSpPr>
+      <p:grpSpPr/>
+      <p:sp>
+        <p:nvSpPr>
+          <p:cNvPr id="2" name="Rectangle 1"/>
+          <p:cNvSpPr/>
+          <p:nvPr/>
+        </p:nvSpPr>
+        <p:spPr>
+          <a:xfrm>
+            <a:off x="0" y="0"/>
+            <a:ext cx="12191695" cy="6858000"/>
+          </a:xfrm>
+          <a:prstGeom prst="rect">
+            <a:avLst/>
+          </a:prstGeom>
+          <a:solidFill>
+            <a:srgbClr val="F6F5F2"/>
+          </a:solidFill>
+          <a:ln>
+            <a:noFill/>
+          </a:ln>
+          <a:effectLst/>
+        </p:spPr>
+        <p:style>
+          <a:lnRef idx="1">
+            <a:schemeClr val="accent1"/>
+          </a:lnRef>
+          <a:fillRef idx="3">
+            <a:schemeClr val="accent1"/>
+          </a:fillRef>
+          <a:effectRef idx="2">
+            <a:schemeClr val="accent1"/>
+          </a:effectRef>
+          <a:fontRef idx="minor">
+            <a:schemeClr val="lt1"/>
+          </a:fontRef>
+        </p:style>
+        <p:txBody>
+          <a:bodyPr rtlCol="0" anchor="ctr"/>
+          <a:lstStyle/>
+          <a:p>
+            <a:pPr algn="ctr"/>
+          </a:p>
+        </p:txBody>
+      </p:sp>
+      <p:sp>
+        <p:nvSpPr>
+          <p:cNvPr id="3" name="TextBox 2"/>
+          <p:cNvSpPr txBox="1"/>
+          <p:nvPr/>
+        </p:nvSpPr>
+        <p:spPr>
+          <a:xfrm>
+            <a:off x="640080" y="384048"/>
+            <a:ext cx="10881360" cy="320040"/>
+          </a:xfrm>
+          <a:prstGeom prst="rect">
+            <a:avLst/>
+          </a:prstGeom>
+          <a:noFill/>
+        </p:spPr>
+        <p:txBody>
+          <a:bodyPr wrap="square" anchor="t" lIns="0" rIns="0" tIns="0" bIns="0">
+            <a:noAutofit/>
+          </a:bodyPr>
+          <a:lstStyle/>
+          <a:p>
+            <a:r>
+              <a:rPr sz="1300" b="1" i="0">
+                <a:solidFill>
+                  <a:srgbClr val="3D6D7E"/>
+                </a:solidFill>
+                <a:latin typeface="Consolas"/>
+              </a:rPr>
+              <a:t>JOB STATUS — NOTES</a:t>
+            </a:r>
+          </a:p>
+        </p:txBody>
+      </p:sp>
+      <p:sp>
+        <p:nvSpPr>
+          <p:cNvPr id="4" name="TextBox 3"/>
+          <p:cNvSpPr txBox="1"/>
+          <p:nvPr/>
+        </p:nvSpPr>
+        <p:spPr>
+          <a:xfrm>
+            <a:off x="640080" y="713232"/>
+            <a:ext cx="10881360" cy="1371600"/>
+          </a:xfrm>
+          <a:prstGeom prst="rect">
+            <a:avLst/>
+          </a:prstGeom>
+          <a:noFill/>
+        </p:spPr>
+        <p:txBody>
+          <a:bodyPr wrap="square" anchor="t" lIns="0" rIns="0" tIns="0" bIns="0">
+            <a:noAutofit/>
+          </a:bodyPr>
+          <a:lstStyle/>
+          <a:p>
+            <a:pPr>
+              <a:lnSpc>
+                <a:spcPct val="105000"/>
+              </a:lnSpc>
+            </a:pPr>
+            <a:r>
+              <a:rPr sz="3200" b="1" i="0">
+                <a:solidFill>
+                  <a:srgbClr val="1C1E22"/>
+                </a:solidFill>
+                <a:latin typeface="Georgia"/>
+              </a:rPr>
+              <a:t>Two facts the diagram compresses away</a:t>
+            </a:r>
+          </a:p>
+        </p:txBody>
+      </p:sp>
+      <p:cxnSp>
+        <p:nvCxnSpPr>
+          <p:cNvPr id="5" name="Connector 4"/>
+          <p:cNvCxnSpPr/>
+          <p:nvPr/>
+        </p:nvCxnSpPr>
+        <p:spPr>
+          <a:xfrm>
+            <a:off x="640080" y="1691640"/>
+            <a:ext cx="10881360" cy="0"/>
+          </a:xfrm>
+          <a:prstGeom prst="line">
+            <a:avLst/>
+          </a:prstGeom>
+          <a:ln w="12700">
+            <a:solidFill>
+              <a:srgbClr val="E2E0DA"/>
+            </a:solidFill>
+          </a:ln>
+        </p:spPr>
+        <p:style>
+          <a:lnRef idx="2">
+            <a:schemeClr val="accent1"/>
+          </a:lnRef>
+          <a:fillRef idx="0">
+            <a:schemeClr val="accent1"/>
+          </a:fillRef>
+          <a:effectRef idx="1">
+            <a:schemeClr val="accent1"/>
+          </a:effectRef>
+          <a:fontRef idx="minor">
+            <a:schemeClr val="tx1"/>
+          </a:fontRef>
+        </p:style>
+      </p:cxnSp>
+      <p:sp>
+        <p:nvSpPr>
+          <p:cNvPr id="6" name="TextBox 5"/>
+          <p:cNvSpPr txBox="1"/>
+          <p:nvPr/>
+        </p:nvSpPr>
+        <p:spPr>
+          <a:xfrm>
+            <a:off x="640080" y="1920240"/>
+            <a:ext cx="10881360" cy="4297680"/>
+          </a:xfrm>
+          <a:prstGeom prst="rect">
+            <a:avLst/>
+          </a:prstGeom>
+          <a:noFill/>
+        </p:spPr>
+        <p:txBody>
+          <a:bodyPr wrap="square" anchor="t" lIns="0" rIns="0" tIns="0" bIns="0">
+            <a:noAutofit/>
+          </a:bodyPr>
+          <a:lstStyle/>
+          <a:p>
+            <a:pPr>
+              <a:lnSpc>
+                <a:spcPct val="112000"/>
+              </a:lnSpc>
+              <a:spcAft>
+                <a:spcPts val="1000"/>
+              </a:spcAft>
+            </a:pPr>
+            <a:r>
+              <a:rPr sz="1600" b="1" i="0">
+                <a:solidFill>
+                  <a:srgbClr val="3D6D7E"/>
+                </a:solidFill>
+                <a:latin typeface="Calibri"/>
+              </a:rPr>
+              <a:t>—  </a:t>
+            </a:r>
+            <a:r>
+              <a:rPr sz="1600" b="1" i="0">
+                <a:solidFill>
+                  <a:srgbClr val="1C1E22"/>
+                </a:solidFill>
+                <a:latin typeface="Calibri"/>
+              </a:rPr>
+              <a:t>The strike tolerance is a flat 2 — </a:t>
+            </a:r>
+            <a:r>
+              <a:rPr sz="1600" b="0" i="0">
+                <a:solidFill>
+                  <a:srgbClr val="1C1E22"/>
+                </a:solidFill>
+                <a:latin typeface="Calibri"/>
+              </a:rPr>
+              <a:t>across every single verb, not tuned per verb (verbTolerance, queue.go:19). A verb with a harder job to get right doesn't get more slack than one with an easy job.</a:t>
+            </a:r>
+          </a:p>
+          <a:p>
+            <a:pPr>
+              <a:lnSpc>
+                <a:spcPct val="112000"/>
+              </a:lnSpc>
+              <a:spcAft>
+                <a:spcPts val="1000"/>
+              </a:spcAft>
+            </a:pPr>
+            <a:r>
+              <a:rPr sz="1600" b="1" i="0">
+                <a:solidFill>
+                  <a:srgbClr val="3D6D7E"/>
+                </a:solidFill>
+                <a:latin typeface="Calibri"/>
+              </a:rPr>
+              <a:t>—  </a:t>
+            </a:r>
+            <a:r>
+              <a:rPr sz="1600" b="1" i="0">
+                <a:solidFill>
+                  <a:srgbClr val="1C1E22"/>
+                </a:solidFill>
+                <a:latin typeface="Calibri"/>
+              </a:rPr>
+              <a:t>failed_retry has two distinct causes that look identical from outside: </a:t>
+            </a:r>
+            <a:r>
+              <a:rPr sz="1600" b="0" i="0">
+                <a:solidFill>
+                  <a:srgbClr val="1C1E22"/>
+                </a:solidFill>
+                <a:latin typeface="Calibri"/>
+              </a:rPr>
+              <a:t>a handler.Validate failure still under tolerance (drawn above), or the orchestrator restarting mid-job (resetStaleRunning) — the job wasn't wrong, the process just didn't finish. Both land a job back in the same queue, reclaimed the same way.</a:t>
+            </a:r>
+          </a:p>
+          <a:p>
+            <a:pPr>
+              <a:lnSpc>
+                <a:spcPct val="112000"/>
+              </a:lnSpc>
+              <a:spcAft>
+                <a:spcPts val="1000"/>
+              </a:spcAft>
+            </a:pPr>
+            <a:r>
+              <a:rPr sz="1600" b="1" i="0">
+                <a:solidFill>
+                  <a:srgbClr val="3D6D7E"/>
+                </a:solidFill>
+                <a:latin typeface="Calibri"/>
+              </a:rPr>
+              <a:t>—  </a:t>
+            </a:r>
+            <a:r>
+              <a:rPr sz="1600" b="0" i="0">
+                <a:solidFill>
+                  <a:srgbClr val="1C1E22"/>
+                </a:solidFill>
+                <a:latin typeface="Calibri"/>
+              </a:rPr>
+              <a:t>EXECUTE_BEAD is still the one exception to all of this — it never enters this generic path; its own supervised loop is Diagram 3.</a:t>
+            </a:r>
+          </a:p>
+        </p:txBody>
+      </p:sp>
+      <p:sp>
+        <p:nvSpPr>
+          <p:cNvPr id="7" name="TextBox 6"/>
+          <p:cNvSpPr txBox="1"/>
+          <p:nvPr/>
+        </p:nvSpPr>
+        <p:spPr>
+          <a:xfrm>
+            <a:off x="640080" y="6473952"/>
+            <a:ext cx="10881360" cy="292608"/>
+          </a:xfrm>
+          <a:prstGeom prst="rect">
+            <a:avLst/>
+          </a:prstGeom>
+          <a:noFill/>
+        </p:spPr>
+        <p:txBody>
+          <a:bodyPr wrap="square" anchor="t" lIns="0" rIns="0" tIns="0" bIns="0">
+            <a:noAutofit/>
+          </a:bodyPr>
+          <a:lstStyle/>
+          <a:p>
+            <a:pPr algn="l"/>
+            <a:r>
+              <a:rPr sz="1000" b="0" i="0">
+                <a:solidFill>
+                  <a:srgbClr val="5F636B"/>
+                </a:solidFill>
+                <a:latin typeface="Consolas"/>
+              </a:rPr>
+              <a:t>RATCHET · STATE MACHINE REFERENCE</a:t>
+            </a:r>
+          </a:p>
+          <a:p/>
+        </p:txBody>
+      </p:sp>
+      <p:sp>
+        <p:nvSpPr>
+          <p:cNvPr id="8" name="TextBox 7"/>
+          <p:cNvSpPr txBox="1"/>
+          <p:nvPr/>
+        </p:nvSpPr>
+        <p:spPr>
+          <a:xfrm>
+            <a:off x="10881360" y="6473952"/>
+            <a:ext cx="640080" cy="292608"/>
+          </a:xfrm>
+          <a:prstGeom prst="rect">
+            <a:avLst/>
+          </a:prstGeom>
+          <a:noFill/>
+        </p:spPr>
+        <p:txBody>
+          <a:bodyPr wrap="square" anchor="t" lIns="0" rIns="0" tIns="0" bIns="0">
+            <a:noAutofit/>
+          </a:bodyPr>
+          <a:lstStyle/>
+          <a:p>
+            <a:pPr algn="r"/>
+            <a:r>
+              <a:rPr sz="1000" b="0" i="0">
+                <a:solidFill>
+                  <a:srgbClr val="5F636B"/>
+                </a:solidFill>
+                <a:latin typeface="Consolas"/>
+              </a:rPr>
+              <a:t>13 / 17</a:t>
+            </a:r>
+          </a:p>
+        </p:txBody>
+      </p:sp>
+      <p:cxnSp>
+        <p:nvCxnSpPr>
+          <p:cNvPr id="9" name="Connector 8"/>
+          <p:cNvCxnSpPr/>
+          <p:nvPr/>
+        </p:nvCxnSpPr>
+        <p:spPr>
+          <a:xfrm>
+            <a:off x="640080" y="6400800"/>
+            <a:ext cx="10881360" cy="0"/>
+          </a:xfrm>
+          <a:prstGeom prst="line">
+            <a:avLst/>
+          </a:prstGeom>
+          <a:ln w="12700">
+            <a:solidFill>
+              <a:srgbClr val="E2E0DA"/>
+            </a:solidFill>
+          </a:ln>
+        </p:spPr>
+        <p:style>
+          <a:lnRef idx="2">
+            <a:schemeClr val="accent1"/>
+          </a:lnRef>
+          <a:fillRef idx="0">
+            <a:schemeClr val="accent1"/>
+          </a:fillRef>
+          <a:effectRef idx="1">
+            <a:schemeClr val="accent1"/>
+          </a:effectRef>
+          <a:fontRef idx="minor">
+            <a:schemeClr val="tx1"/>
+          </a:fontRef>
+        </p:style>
+      </p:cxnSp>
+    </p:spTree>
+  </p:cSld>
+  <p:clrMapOvr>
+    <a:masterClrMapping/>
+  </p:clrMapOvr>
+</p:sld>
+</file>
+
+<file path=ppt/slides/slide14.xml><?xml version="1.0" encoding="utf-8"?>
 <p:sld xmlns:a="http://schemas.openxmlformats.org/drawingml/2006/main" xmlns:p="http://schemas.openxmlformats.org/presentationml/2006/main" xmlns:r="http://schemas.openxmlformats.org/officeDocument/2006/relationships">
   <p:cSld>
     <p:spTree>
@@ -6923,455 +7325,7 @@
                 </a:solidFill>
                 <a:latin typeface="Consolas"/>
               </a:rPr>
-              <a:t>13 / 16</a:t>
-            </a:r>
-          </a:p>
-        </p:txBody>
-      </p:sp>
-      <p:cxnSp>
-        <p:nvCxnSpPr>
-          <p:cNvPr id="9" name="Connector 8"/>
-          <p:cNvCxnSpPr/>
-          <p:nvPr/>
-        </p:nvCxnSpPr>
-        <p:spPr>
-          <a:xfrm>
-            <a:off x="640080" y="6400800"/>
-            <a:ext cx="10881360" cy="0"/>
-          </a:xfrm>
-          <a:prstGeom prst="line">
-            <a:avLst/>
-          </a:prstGeom>
-          <a:ln w="12700">
-            <a:solidFill>
-              <a:srgbClr val="E2E0DA"/>
-            </a:solidFill>
-          </a:ln>
-        </p:spPr>
-        <p:style>
-          <a:lnRef idx="2">
-            <a:schemeClr val="accent1"/>
-          </a:lnRef>
-          <a:fillRef idx="0">
-            <a:schemeClr val="accent1"/>
-          </a:fillRef>
-          <a:effectRef idx="1">
-            <a:schemeClr val="accent1"/>
-          </a:effectRef>
-          <a:fontRef idx="minor">
-            <a:schemeClr val="tx1"/>
-          </a:fontRef>
-        </p:style>
-      </p:cxnSp>
-    </p:spTree>
-  </p:cSld>
-  <p:clrMapOvr>
-    <a:masterClrMapping/>
-  </p:clrMapOvr>
-</p:sld>
-</file>
-
-<file path=ppt/slides/slide14.xml><?xml version="1.0" encoding="utf-8"?>
-<p:sld xmlns:a="http://schemas.openxmlformats.org/drawingml/2006/main" xmlns:p="http://schemas.openxmlformats.org/presentationml/2006/main" xmlns:r="http://schemas.openxmlformats.org/officeDocument/2006/relationships">
-  <p:cSld>
-    <p:spTree>
-      <p:nvGrpSpPr>
-        <p:cNvPr id="1" name=""/>
-        <p:cNvGrpSpPr/>
-        <p:nvPr/>
-      </p:nvGrpSpPr>
-      <p:grpSpPr/>
-      <p:sp>
-        <p:nvSpPr>
-          <p:cNvPr id="2" name="Rectangle 1"/>
-          <p:cNvSpPr/>
-          <p:nvPr/>
-        </p:nvSpPr>
-        <p:spPr>
-          <a:xfrm>
-            <a:off x="0" y="0"/>
-            <a:ext cx="12191695" cy="6858000"/>
-          </a:xfrm>
-          <a:prstGeom prst="rect">
-            <a:avLst/>
-          </a:prstGeom>
-          <a:solidFill>
-            <a:srgbClr val="F6F5F2"/>
-          </a:solidFill>
-          <a:ln>
-            <a:noFill/>
-          </a:ln>
-          <a:effectLst/>
-        </p:spPr>
-        <p:style>
-          <a:lnRef idx="1">
-            <a:schemeClr val="accent1"/>
-          </a:lnRef>
-          <a:fillRef idx="3">
-            <a:schemeClr val="accent1"/>
-          </a:fillRef>
-          <a:effectRef idx="2">
-            <a:schemeClr val="accent1"/>
-          </a:effectRef>
-          <a:fontRef idx="minor">
-            <a:schemeClr val="lt1"/>
-          </a:fontRef>
-        </p:style>
-        <p:txBody>
-          <a:bodyPr rtlCol="0" anchor="ctr"/>
-          <a:lstStyle/>
-          <a:p>
-            <a:pPr algn="ctr"/>
-          </a:p>
-        </p:txBody>
-      </p:sp>
-      <p:sp>
-        <p:nvSpPr>
-          <p:cNvPr id="3" name="TextBox 2"/>
-          <p:cNvSpPr txBox="1"/>
-          <p:nvPr/>
-        </p:nvSpPr>
-        <p:spPr>
-          <a:xfrm>
-            <a:off x="640080" y="384048"/>
-            <a:ext cx="10881360" cy="320040"/>
-          </a:xfrm>
-          <a:prstGeom prst="rect">
-            <a:avLst/>
-          </a:prstGeom>
-          <a:noFill/>
-        </p:spPr>
-        <p:txBody>
-          <a:bodyPr wrap="square" anchor="t" lIns="0" rIns="0" tIns="0" bIns="0">
-            <a:noAutofit/>
-          </a:bodyPr>
-          <a:lstStyle/>
-          <a:p>
-            <a:r>
-              <a:rPr sz="1300" b="1" i="0">
-                <a:solidFill>
-                  <a:srgbClr val="3D6D7E"/>
-                </a:solidFill>
-                <a:latin typeface="Consolas"/>
-              </a:rPr>
-              <a:t>CASCADE ITERATIONS (LOOP-MODE)</a:t>
-            </a:r>
-          </a:p>
-        </p:txBody>
-      </p:sp>
-      <p:sp>
-        <p:nvSpPr>
-          <p:cNvPr id="4" name="TextBox 3"/>
-          <p:cNvSpPr txBox="1"/>
-          <p:nvPr/>
-        </p:nvSpPr>
-        <p:spPr>
-          <a:xfrm>
-            <a:off x="640080" y="713232"/>
-            <a:ext cx="10881360" cy="1371600"/>
-          </a:xfrm>
-          <a:prstGeom prst="rect">
-            <a:avLst/>
-          </a:prstGeom>
-          <a:noFill/>
-        </p:spPr>
-        <p:txBody>
-          <a:bodyPr wrap="square" anchor="t" lIns="0" rIns="0" tIns="0" bIns="0">
-            <a:noAutofit/>
-          </a:bodyPr>
-          <a:lstStyle/>
-          <a:p>
-            <a:pPr>
-              <a:lnSpc>
-                <a:spcPct val="105000"/>
-              </a:lnSpc>
-            </a:pPr>
-            <a:r>
-              <a:rPr sz="3200" b="1" i="0">
-                <a:solidFill>
-                  <a:srgbClr val="1C1E22"/>
-                </a:solidFill>
-                <a:latin typeface="Georgia"/>
-              </a:rPr>
-              <a:t>clone-project --design-doc &lt;new.md&gt;</a:t>
-            </a:r>
-          </a:p>
-        </p:txBody>
-      </p:sp>
-      <p:cxnSp>
-        <p:nvCxnSpPr>
-          <p:cNvPr id="5" name="Connector 4"/>
-          <p:cNvCxnSpPr/>
-          <p:nvPr/>
-        </p:nvCxnSpPr>
-        <p:spPr>
-          <a:xfrm>
-            <a:off x="640080" y="1691640"/>
-            <a:ext cx="10881360" cy="0"/>
-          </a:xfrm>
-          <a:prstGeom prst="line">
-            <a:avLst/>
-          </a:prstGeom>
-          <a:ln w="12700">
-            <a:solidFill>
-              <a:srgbClr val="E2E0DA"/>
-            </a:solidFill>
-          </a:ln>
-        </p:spPr>
-        <p:style>
-          <a:lnRef idx="2">
-            <a:schemeClr val="accent1"/>
-          </a:lnRef>
-          <a:fillRef idx="0">
-            <a:schemeClr val="accent1"/>
-          </a:fillRef>
-          <a:effectRef idx="1">
-            <a:schemeClr val="accent1"/>
-          </a:effectRef>
-          <a:fontRef idx="minor">
-            <a:schemeClr val="tx1"/>
-          </a:fontRef>
-        </p:style>
-      </p:cxnSp>
-      <p:sp>
-        <p:nvSpPr>
-          <p:cNvPr id="6" name="TextBox 5"/>
-          <p:cNvSpPr txBox="1"/>
-          <p:nvPr/>
-        </p:nvSpPr>
-        <p:spPr>
-          <a:xfrm>
-            <a:off x="640080" y="1965960"/>
-            <a:ext cx="10881360" cy="4251960"/>
-          </a:xfrm>
-          <a:prstGeom prst="rect">
-            <a:avLst/>
-          </a:prstGeom>
-          <a:noFill/>
-        </p:spPr>
-        <p:txBody>
-          <a:bodyPr wrap="square" anchor="t" lIns="0" rIns="0" tIns="0" bIns="0">
-            <a:noAutofit/>
-          </a:bodyPr>
-          <a:lstStyle/>
-          <a:p>
-            <a:pPr>
-              <a:lnSpc>
-                <a:spcPct val="112000"/>
-              </a:lnSpc>
-              <a:spcAft>
-                <a:spcPts val="1000"/>
-              </a:spcAft>
-            </a:pPr>
-            <a:r>
-              <a:rPr sz="1350" b="1" i="0">
-                <a:solidFill>
-                  <a:srgbClr val="3D6D7E"/>
-                </a:solidFill>
-                <a:latin typeface="Calibri"/>
-              </a:rPr>
-              <a:t>—  </a:t>
-            </a:r>
-            <a:r>
-              <a:rPr sz="1350" b="0" i="0">
-                <a:solidFill>
-                  <a:srgbClr val="1C1E22"/>
-                </a:solidFill>
-                <a:latin typeface="Calibri"/>
-              </a:rPr>
-              <a:t>Creates a new project in the same lineage, inheriting the baseline's beads, bead_revisions, and full execution/adjudication history — then overwrites the design doc and sets cascade_baseline_project_id.</a:t>
-            </a:r>
-          </a:p>
-          <a:p>
-            <a:pPr>
-              <a:lnSpc>
-                <a:spcPct val="112000"/>
-              </a:lnSpc>
-              <a:spcAft>
-                <a:spcPts val="1000"/>
-              </a:spcAft>
-            </a:pPr>
-            <a:r>
-              <a:rPr sz="1350" b="1" i="0">
-                <a:solidFill>
-                  <a:srgbClr val="3D6D7E"/>
-                </a:solidFill>
-                <a:latin typeface="Calibri"/>
-              </a:rPr>
-              <a:t>—  </a:t>
-            </a:r>
-            <a:r>
-              <a:rPr sz="1350" b="0" i="0">
-                <a:solidFill>
-                  <a:srgbClr val="1C1E22"/>
-                </a:solidFill>
-                <a:latin typeface="Calibri"/>
-              </a:rPr>
-              <a:t>One fresh AUDIT_DECOMPOSITION is enqueued. SURVEY_SPEC and DECOMPOSE_SPEC never run — the inherited beads ARE the decomposition. RECONCILE may not rename, add, or remove beads, so titles stay stable across the clone boundary.</a:t>
-            </a:r>
-          </a:p>
-          <a:p>
-            <a:pPr>
-              <a:lnSpc>
-                <a:spcPct val="112000"/>
-              </a:lnSpc>
-              <a:spcAft>
-                <a:spcPts val="1000"/>
-              </a:spcAft>
-            </a:pPr>
-            <a:r>
-              <a:rPr sz="1350" b="1" i="0">
-                <a:solidFill>
-                  <a:srgbClr val="3D6D7E"/>
-                </a:solidFill>
-                <a:latin typeface="Calibri"/>
-              </a:rPr>
-              <a:t>—  </a:t>
-            </a:r>
-            <a:r>
-              <a:rPr sz="1350" b="1" i="0">
-                <a:solidFill>
-                  <a:srgbClr val="1C1E22"/>
-                </a:solidFill>
-                <a:latin typeface="Calibri"/>
-              </a:rPr>
-              <a:t>Every changed bead — </a:t>
-            </a:r>
-            <a:r>
-              <a:rPr sz="1350" b="0" i="0">
-                <a:solidFill>
-                  <a:srgbClr val="1C1E22"/>
-                </a:solidFill>
-                <a:latin typeface="Calibri"/>
-              </a:rPr>
-              <a:t>spec differs from baseline, by title, deliberately liberal comparison — gets reset by resetBeadForRerun, even if already succeeded: active jobs cancelled, test files deleted, impl reset to stubs, pre-reset files snapshotted first.</a:t>
-            </a:r>
-          </a:p>
-          <a:p>
-            <a:pPr>
-              <a:lnSpc>
-                <a:spcPct val="112000"/>
-              </a:lnSpc>
-              <a:spcAft>
-                <a:spcPts val="1000"/>
-              </a:spcAft>
-            </a:pPr>
-            <a:r>
-              <a:rPr sz="1350" b="1" i="0">
-                <a:solidFill>
-                  <a:srgbClr val="3D6D7E"/>
-                </a:solidFill>
-                <a:latin typeface="Calibri"/>
-              </a:rPr>
-              <a:t>—  </a:t>
-            </a:r>
-            <a:r>
-              <a:rPr sz="1350" b="0" i="0">
-                <a:solidFill>
-                  <a:srgbClr val="1C1E22"/>
-                </a:solidFill>
-                <a:latin typeface="Calibri"/>
-              </a:rPr>
-              <a:t>Unchanged beads are left exactly as cloned — status, files, history untouched.</a:t>
-            </a:r>
-          </a:p>
-          <a:p>
-            <a:pPr>
-              <a:lnSpc>
-                <a:spcPct val="112000"/>
-              </a:lnSpc>
-              <a:spcAft>
-                <a:spcPts val="1000"/>
-              </a:spcAft>
-            </a:pPr>
-            <a:r>
-              <a:rPr sz="1350" b="1" i="0">
-                <a:solidFill>
-                  <a:srgbClr val="3D6D7E"/>
-                </a:solidFill>
-                <a:latin typeface="Calibri"/>
-              </a:rPr>
-              <a:t>—  </a:t>
-            </a:r>
-            <a:r>
-              <a:rPr sz="1350" b="0" i="0">
-                <a:solidFill>
-                  <a:srgbClr val="1C1E22"/>
-                </a:solidFill>
-                <a:latin typeface="Calibri"/>
-              </a:rPr>
-              <a:t>≥1 changed bead: lowest-id changed bead's execution is enqueued. Zero changed: project marked complete directly, no pause, nothing to resume into.</a:t>
-            </a:r>
-          </a:p>
-        </p:txBody>
-      </p:sp>
-      <p:sp>
-        <p:nvSpPr>
-          <p:cNvPr id="7" name="TextBox 6"/>
-          <p:cNvSpPr txBox="1"/>
-          <p:nvPr/>
-        </p:nvSpPr>
-        <p:spPr>
-          <a:xfrm>
-            <a:off x="640080" y="6473952"/>
-            <a:ext cx="10881360" cy="292608"/>
-          </a:xfrm>
-          <a:prstGeom prst="rect">
-            <a:avLst/>
-          </a:prstGeom>
-          <a:noFill/>
-        </p:spPr>
-        <p:txBody>
-          <a:bodyPr wrap="square" anchor="t" lIns="0" rIns="0" tIns="0" bIns="0">
-            <a:noAutofit/>
-          </a:bodyPr>
-          <a:lstStyle/>
-          <a:p>
-            <a:pPr algn="l"/>
-            <a:r>
-              <a:rPr sz="1000" b="0" i="0">
-                <a:solidFill>
-                  <a:srgbClr val="5F636B"/>
-                </a:solidFill>
-                <a:latin typeface="Consolas"/>
-              </a:rPr>
-              <a:t>RATCHET · STATE MACHINE REFERENCE</a:t>
-            </a:r>
-          </a:p>
-          <a:p/>
-        </p:txBody>
-      </p:sp>
-      <p:sp>
-        <p:nvSpPr>
-          <p:cNvPr id="8" name="TextBox 7"/>
-          <p:cNvSpPr txBox="1"/>
-          <p:nvPr/>
-        </p:nvSpPr>
-        <p:spPr>
-          <a:xfrm>
-            <a:off x="10881360" y="6473952"/>
-            <a:ext cx="640080" cy="292608"/>
-          </a:xfrm>
-          <a:prstGeom prst="rect">
-            <a:avLst/>
-          </a:prstGeom>
-          <a:noFill/>
-        </p:spPr>
-        <p:txBody>
-          <a:bodyPr wrap="square" anchor="t" lIns="0" rIns="0" tIns="0" bIns="0">
-            <a:noAutofit/>
-          </a:bodyPr>
-          <a:lstStyle/>
-          <a:p>
-            <a:pPr algn="r"/>
-            <a:r>
-              <a:rPr sz="1000" b="0" i="0">
-                <a:solidFill>
-                  <a:srgbClr val="5F636B"/>
-                </a:solidFill>
-                <a:latin typeface="Consolas"/>
-              </a:rPr>
-              <a:t>14 / 16</a:t>
+              <a:t>14 / 17</a:t>
             </a:r>
           </a:p>
         </p:txBody>
@@ -7502,7 +7456,7 @@
                 </a:solidFill>
                 <a:latin typeface="Consolas"/>
               </a:rPr>
-              <a:t>RECOVERY TOOLS</a:t>
+              <a:t>CASCADE ITERATIONS (LOOP-MODE)</a:t>
             </a:r>
           </a:p>
         </p:txBody>
@@ -7535,13 +7489,13 @@
               </a:lnSpc>
             </a:pPr>
             <a:r>
-              <a:rPr sz="2800" b="1" i="0">
+              <a:rPr sz="3200" b="1" i="0">
                 <a:solidFill>
                   <a:srgbClr val="1C1E22"/>
                 </a:solidFill>
                 <a:latin typeface="Georgia"/>
               </a:rPr>
-              <a:t>Four ways a human intervenes</a:t>
+              <a:t>clone-project --design-doc &lt;new.md&gt;</a:t>
             </a:r>
           </a:p>
         </p:txBody>
@@ -7590,41 +7544,7 @@
         <p:spPr>
           <a:xfrm>
             <a:off x="640080" y="1965960"/>
-            <a:ext cx="5212080" cy="365760"/>
-          </a:xfrm>
-          <a:prstGeom prst="rect">
-            <a:avLst/>
-          </a:prstGeom>
-          <a:noFill/>
-        </p:spPr>
-        <p:txBody>
-          <a:bodyPr wrap="square" anchor="t" lIns="0" rIns="0" tIns="0" bIns="0">
-            <a:noAutofit/>
-          </a:bodyPr>
-          <a:lstStyle/>
-          <a:p>
-            <a:r>
-              <a:rPr sz="1500" b="1" i="0">
-                <a:solidFill>
-                  <a:srgbClr val="3D6D7E"/>
-                </a:solidFill>
-                <a:latin typeface="Consolas"/>
-              </a:rPr>
-              <a:t>PER-BEAD</a:t>
-            </a:r>
-          </a:p>
-        </p:txBody>
-      </p:sp>
-      <p:sp>
-        <p:nvSpPr>
-          <p:cNvPr id="7" name="TextBox 6"/>
-          <p:cNvSpPr txBox="1"/>
-          <p:nvPr/>
-        </p:nvSpPr>
-        <p:spPr>
-          <a:xfrm>
-            <a:off x="640080" y="2423160"/>
-            <a:ext cx="5212080" cy="3749039"/>
+            <a:ext cx="10881360" cy="4251960"/>
           </a:xfrm>
           <a:prstGeom prst="rect">
             <a:avLst/>
@@ -7646,7 +7566,7 @@
               </a:spcAft>
             </a:pPr>
             <a:r>
-              <a:rPr sz="1600" b="1" i="0">
+              <a:rPr sz="1350" b="1" i="0">
                 <a:solidFill>
                   <a:srgbClr val="3D6D7E"/>
                 </a:solidFill>
@@ -7655,22 +7575,13 @@
               <a:t>—  </a:t>
             </a:r>
             <a:r>
-              <a:rPr sz="1600" b="1" i="0">
+              <a:rPr sz="1350" b="0" i="0">
                 <a:solidFill>
                   <a:srgbClr val="1C1E22"/>
                 </a:solidFill>
                 <a:latin typeface="Calibri"/>
               </a:rPr>
-              <a:t>rewind-bead — </a:t>
-            </a:r>
-            <a:r>
-              <a:rPr sz="1600" b="0" i="0">
-                <a:solidFill>
-                  <a:srgbClr val="1C1E22"/>
-                </a:solidFill>
-                <a:latin typeface="Calibri"/>
-              </a:rPr>
-              <a:t>the sanctioned path for any per-bead escalation. Resets to REFINE_TESTS_WRITE cycle 1, stubs impl files, fresh attempt budget. Always discards whatever implementation exists on disk. Refuses a succeeded bead.</a:t>
+              <a:t>Creates a new project in the same lineage, inheriting the baseline's beads, bead_revisions, and full execution/adjudication history — then overwrites the design doc and sets cascade_baseline_project_id.</a:t>
             </a:r>
           </a:p>
           <a:p>
@@ -7683,7 +7594,7 @@
               </a:spcAft>
             </a:pPr>
             <a:r>
-              <a:rPr sz="1600" b="1" i="0">
+              <a:rPr sz="1350" b="1" i="0">
                 <a:solidFill>
                   <a:srgbClr val="3D6D7E"/>
                 </a:solidFill>
@@ -7692,81 +7603,15 @@
               <a:t>—  </a:t>
             </a:r>
             <a:r>
-              <a:rPr sz="1600" b="1" i="0">
+              <a:rPr sz="1350" b="0" i="0">
                 <a:solidFill>
                   <a:srgbClr val="1C1E22"/>
                 </a:solidFill>
                 <a:latin typeface="Calibri"/>
               </a:rPr>
-              <a:t>Requeue (UI) — </a:t>
-            </a:r>
-            <a:r>
-              <a:rPr sz="1600" b="0" i="0">
-                <a:solidFill>
-                  <a:srgbClr val="1C1E22"/>
-                </a:solidFill>
-                <a:latin typeface="Calibri"/>
-              </a:rPr>
-              <a:t>try the exact same job again. Useful for transient failures, not a spec problem.</a:t>
-            </a:r>
-          </a:p>
-        </p:txBody>
-      </p:sp>
-      <p:sp>
-        <p:nvSpPr>
-          <p:cNvPr id="8" name="TextBox 7"/>
-          <p:cNvSpPr txBox="1"/>
-          <p:nvPr/>
-        </p:nvSpPr>
-        <p:spPr>
-          <a:xfrm>
-            <a:off x="6309360" y="1965960"/>
-            <a:ext cx="5212080" cy="365760"/>
-          </a:xfrm>
-          <a:prstGeom prst="rect">
-            <a:avLst/>
-          </a:prstGeom>
-          <a:noFill/>
-        </p:spPr>
-        <p:txBody>
-          <a:bodyPr wrap="square" anchor="t" lIns="0" rIns="0" tIns="0" bIns="0">
-            <a:noAutofit/>
-          </a:bodyPr>
-          <a:lstStyle/>
-          <a:p>
-            <a:r>
-              <a:rPr sz="1500" b="1" i="0">
-                <a:solidFill>
-                  <a:srgbClr val="3D6D7E"/>
-                </a:solidFill>
-                <a:latin typeface="Consolas"/>
-              </a:rPr>
-              <a:t>PROJECT-LEVEL</a:t>
-            </a:r>
-          </a:p>
-        </p:txBody>
-      </p:sp>
-      <p:sp>
-        <p:nvSpPr>
-          <p:cNvPr id="9" name="TextBox 8"/>
-          <p:cNvSpPr txBox="1"/>
-          <p:nvPr/>
-        </p:nvSpPr>
-        <p:spPr>
-          <a:xfrm>
-            <a:off x="6309360" y="2423160"/>
-            <a:ext cx="5212080" cy="3749039"/>
-          </a:xfrm>
-          <a:prstGeom prst="rect">
-            <a:avLst/>
-          </a:prstGeom>
-          <a:noFill/>
-        </p:spPr>
-        <p:txBody>
-          <a:bodyPr wrap="square" anchor="t" lIns="0" rIns="0" tIns="0" bIns="0">
-            <a:noAutofit/>
-          </a:bodyPr>
-          <a:lstStyle/>
+              <a:t>One fresh AUDIT_DECOMPOSITION is enqueued. SURVEY_SPEC and DECOMPOSE_SPEC never run — the inherited beads ARE the decomposition. RECONCILE may not rename, add, or remove beads, so titles stay stable across the clone boundary.</a:t>
+            </a:r>
+          </a:p>
           <a:p>
             <a:pPr>
               <a:lnSpc>
@@ -7777,7 +7622,7 @@
               </a:spcAft>
             </a:pPr>
             <a:r>
-              <a:rPr sz="1600" b="1" i="0">
+              <a:rPr sz="1350" b="1" i="0">
                 <a:solidFill>
                   <a:srgbClr val="3D6D7E"/>
                 </a:solidFill>
@@ -7786,22 +7631,22 @@
               <a:t>—  </a:t>
             </a:r>
             <a:r>
-              <a:rPr sz="1600" b="1" i="0">
+              <a:rPr sz="1350" b="1" i="0">
                 <a:solidFill>
                   <a:srgbClr val="1C1E22"/>
                 </a:solidFill>
                 <a:latin typeface="Calibri"/>
               </a:rPr>
-              <a:t>resume-project — </a:t>
-            </a:r>
-            <a:r>
-              <a:rPr sz="1600" b="0" i="0">
+              <a:t>Every changed bead — </a:t>
+            </a:r>
+            <a:r>
+              <a:rPr sz="1350" b="0" i="0">
                 <a:solidFill>
                   <a:srgbClr val="1C1E22"/>
                 </a:solidFill>
                 <a:latin typeface="Calibri"/>
               </a:rPr>
-              <a:t>pure status flip; only ever re-dispatches bead 1, or for a cascade project, re-enters at DECOMPOSITION_APPROVED.</a:t>
+              <a:t>spec differs from baseline, by title, deliberately liberal comparison — gets reset by resetBeadForRerun, even if already succeeded: active jobs cancelled, test files deleted, impl reset to stubs, pre-reset files snapshotted first.</a:t>
             </a:r>
           </a:p>
           <a:p>
@@ -7814,7 +7659,7 @@
               </a:spcAft>
             </a:pPr>
             <a:r>
-              <a:rPr sz="1600" b="1" i="0">
+              <a:rPr sz="1350" b="1" i="0">
                 <a:solidFill>
                   <a:srgbClr val="3D6D7E"/>
                 </a:solidFill>
@@ -7823,22 +7668,13 @@
               <a:t>—  </a:t>
             </a:r>
             <a:r>
-              <a:rPr sz="1600" b="1" i="0">
+              <a:rPr sz="1350" b="0" i="0">
                 <a:solidFill>
                   <a:srgbClr val="1C1E22"/>
                 </a:solidFill>
                 <a:latin typeface="Calibri"/>
               </a:rPr>
-              <a:t>full-stop-project — </a:t>
-            </a:r>
-            <a:r>
-              <a:rPr sz="1600" b="0" i="0">
-                <a:solidFill>
-                  <a:srgbClr val="1C1E22"/>
-                </a:solidFill>
-                <a:latin typeface="Calibri"/>
-              </a:rPr>
-              <a:t>the manual equivalent of a project-wide escalation.</a:t>
+              <a:t>Unchanged beads are left exactly as cloned — status, files, history untouched.</a:t>
             </a:r>
           </a:p>
           <a:p>
@@ -7851,7 +7687,7 @@
               </a:spcAft>
             </a:pPr>
             <a:r>
-              <a:rPr sz="1600" b="1" i="0">
+              <a:rPr sz="1350" b="1" i="0">
                 <a:solidFill>
                   <a:srgbClr val="3D6D7E"/>
                 </a:solidFill>
@@ -7860,64 +7696,20 @@
               <a:t>—  </a:t>
             </a:r>
             <a:r>
-              <a:rPr sz="1600" b="1" i="0">
+              <a:rPr sz="1350" b="0" i="0">
                 <a:solidFill>
                   <a:srgbClr val="1C1E22"/>
                 </a:solidFill>
                 <a:latin typeface="Calibri"/>
               </a:rPr>
-              <a:t>Never: </a:t>
-            </a:r>
-            <a:r>
-              <a:rPr sz="1600" b="0" i="0">
-                <a:solidFill>
-                  <a:srgbClr val="1C1E22"/>
-                </a:solidFill>
-                <a:latin typeface="Calibri"/>
-              </a:rPr>
-              <a:t>hand-editing the database, or patching a test to force it green — convention, not code, but held.</a:t>
-            </a:r>
-          </a:p>
-        </p:txBody>
-      </p:sp>
-      <p:cxnSp>
-        <p:nvCxnSpPr>
-          <p:cNvPr id="10" name="Connector 9"/>
-          <p:cNvCxnSpPr/>
-          <p:nvPr/>
-        </p:nvCxnSpPr>
-        <p:spPr>
-          <a:xfrm>
-            <a:off x="6035040" y="1965960"/>
-            <a:ext cx="0" cy="4251960"/>
-          </a:xfrm>
-          <a:prstGeom prst="line">
-            <a:avLst/>
-          </a:prstGeom>
-          <a:ln w="12700">
-            <a:solidFill>
-              <a:srgbClr val="E2E0DA"/>
-            </a:solidFill>
-          </a:ln>
-        </p:spPr>
-        <p:style>
-          <a:lnRef idx="2">
-            <a:schemeClr val="accent1"/>
-          </a:lnRef>
-          <a:fillRef idx="0">
-            <a:schemeClr val="accent1"/>
-          </a:fillRef>
-          <a:effectRef idx="1">
-            <a:schemeClr val="accent1"/>
-          </a:effectRef>
-          <a:fontRef idx="minor">
-            <a:schemeClr val="tx1"/>
-          </a:fontRef>
-        </p:style>
-      </p:cxnSp>
-      <p:sp>
-        <p:nvSpPr>
-          <p:cNvPr id="11" name="TextBox 10"/>
+              <a:t>≥1 changed bead: lowest-id changed bead's execution is enqueued. Zero changed: project marked complete directly, no pause, nothing to resume into.</a:t>
+            </a:r>
+          </a:p>
+        </p:txBody>
+      </p:sp>
+      <p:sp>
+        <p:nvSpPr>
+          <p:cNvPr id="7" name="TextBox 6"/>
           <p:cNvSpPr txBox="1"/>
           <p:nvPr/>
         </p:nvSpPr>
@@ -7953,7 +7745,7 @@
       </p:sp>
       <p:sp>
         <p:nvSpPr>
-          <p:cNvPr id="12" name="TextBox 11"/>
+          <p:cNvPr id="8" name="TextBox 7"/>
           <p:cNvSpPr txBox="1"/>
           <p:nvPr/>
         </p:nvSpPr>
@@ -7981,14 +7773,14 @@
                 </a:solidFill>
                 <a:latin typeface="Consolas"/>
               </a:rPr>
-              <a:t>15 / 16</a:t>
+              <a:t>15 / 17</a:t>
             </a:r>
           </a:p>
         </p:txBody>
       </p:sp>
       <p:cxnSp>
         <p:nvCxnSpPr>
-          <p:cNvPr id="13" name="Connector 12"/>
+          <p:cNvPr id="9" name="Connector 8"/>
           <p:cNvCxnSpPr/>
           <p:nvPr/>
         </p:nvCxnSpPr>
@@ -8054,6 +7846,616 @@
             <a:avLst/>
           </a:prstGeom>
           <a:solidFill>
+            <a:srgbClr val="F6F5F2"/>
+          </a:solidFill>
+          <a:ln>
+            <a:noFill/>
+          </a:ln>
+          <a:effectLst/>
+        </p:spPr>
+        <p:style>
+          <a:lnRef idx="1">
+            <a:schemeClr val="accent1"/>
+          </a:lnRef>
+          <a:fillRef idx="3">
+            <a:schemeClr val="accent1"/>
+          </a:fillRef>
+          <a:effectRef idx="2">
+            <a:schemeClr val="accent1"/>
+          </a:effectRef>
+          <a:fontRef idx="minor">
+            <a:schemeClr val="lt1"/>
+          </a:fontRef>
+        </p:style>
+        <p:txBody>
+          <a:bodyPr rtlCol="0" anchor="ctr"/>
+          <a:lstStyle/>
+          <a:p>
+            <a:pPr algn="ctr"/>
+          </a:p>
+        </p:txBody>
+      </p:sp>
+      <p:sp>
+        <p:nvSpPr>
+          <p:cNvPr id="3" name="TextBox 2"/>
+          <p:cNvSpPr txBox="1"/>
+          <p:nvPr/>
+        </p:nvSpPr>
+        <p:spPr>
+          <a:xfrm>
+            <a:off x="640080" y="384048"/>
+            <a:ext cx="10881360" cy="320040"/>
+          </a:xfrm>
+          <a:prstGeom prst="rect">
+            <a:avLst/>
+          </a:prstGeom>
+          <a:noFill/>
+        </p:spPr>
+        <p:txBody>
+          <a:bodyPr wrap="square" anchor="t" lIns="0" rIns="0" tIns="0" bIns="0">
+            <a:noAutofit/>
+          </a:bodyPr>
+          <a:lstStyle/>
+          <a:p>
+            <a:r>
+              <a:rPr sz="1300" b="1" i="0">
+                <a:solidFill>
+                  <a:srgbClr val="3D6D7E"/>
+                </a:solidFill>
+                <a:latin typeface="Consolas"/>
+              </a:rPr>
+              <a:t>RECOVERY TOOLS</a:t>
+            </a:r>
+          </a:p>
+        </p:txBody>
+      </p:sp>
+      <p:sp>
+        <p:nvSpPr>
+          <p:cNvPr id="4" name="TextBox 3"/>
+          <p:cNvSpPr txBox="1"/>
+          <p:nvPr/>
+        </p:nvSpPr>
+        <p:spPr>
+          <a:xfrm>
+            <a:off x="640080" y="713232"/>
+            <a:ext cx="10881360" cy="1371600"/>
+          </a:xfrm>
+          <a:prstGeom prst="rect">
+            <a:avLst/>
+          </a:prstGeom>
+          <a:noFill/>
+        </p:spPr>
+        <p:txBody>
+          <a:bodyPr wrap="square" anchor="t" lIns="0" rIns="0" tIns="0" bIns="0">
+            <a:noAutofit/>
+          </a:bodyPr>
+          <a:lstStyle/>
+          <a:p>
+            <a:pPr>
+              <a:lnSpc>
+                <a:spcPct val="105000"/>
+              </a:lnSpc>
+            </a:pPr>
+            <a:r>
+              <a:rPr sz="2800" b="1" i="0">
+                <a:solidFill>
+                  <a:srgbClr val="1C1E22"/>
+                </a:solidFill>
+                <a:latin typeface="Georgia"/>
+              </a:rPr>
+              <a:t>Four ways a human intervenes</a:t>
+            </a:r>
+          </a:p>
+        </p:txBody>
+      </p:sp>
+      <p:cxnSp>
+        <p:nvCxnSpPr>
+          <p:cNvPr id="5" name="Connector 4"/>
+          <p:cNvCxnSpPr/>
+          <p:nvPr/>
+        </p:nvCxnSpPr>
+        <p:spPr>
+          <a:xfrm>
+            <a:off x="640080" y="1691640"/>
+            <a:ext cx="10881360" cy="0"/>
+          </a:xfrm>
+          <a:prstGeom prst="line">
+            <a:avLst/>
+          </a:prstGeom>
+          <a:ln w="12700">
+            <a:solidFill>
+              <a:srgbClr val="E2E0DA"/>
+            </a:solidFill>
+          </a:ln>
+        </p:spPr>
+        <p:style>
+          <a:lnRef idx="2">
+            <a:schemeClr val="accent1"/>
+          </a:lnRef>
+          <a:fillRef idx="0">
+            <a:schemeClr val="accent1"/>
+          </a:fillRef>
+          <a:effectRef idx="1">
+            <a:schemeClr val="accent1"/>
+          </a:effectRef>
+          <a:fontRef idx="minor">
+            <a:schemeClr val="tx1"/>
+          </a:fontRef>
+        </p:style>
+      </p:cxnSp>
+      <p:sp>
+        <p:nvSpPr>
+          <p:cNvPr id="6" name="TextBox 5"/>
+          <p:cNvSpPr txBox="1"/>
+          <p:nvPr/>
+        </p:nvSpPr>
+        <p:spPr>
+          <a:xfrm>
+            <a:off x="640080" y="1965960"/>
+            <a:ext cx="5212080" cy="365760"/>
+          </a:xfrm>
+          <a:prstGeom prst="rect">
+            <a:avLst/>
+          </a:prstGeom>
+          <a:noFill/>
+        </p:spPr>
+        <p:txBody>
+          <a:bodyPr wrap="square" anchor="t" lIns="0" rIns="0" tIns="0" bIns="0">
+            <a:noAutofit/>
+          </a:bodyPr>
+          <a:lstStyle/>
+          <a:p>
+            <a:r>
+              <a:rPr sz="1500" b="1" i="0">
+                <a:solidFill>
+                  <a:srgbClr val="3D6D7E"/>
+                </a:solidFill>
+                <a:latin typeface="Consolas"/>
+              </a:rPr>
+              <a:t>PER-BEAD</a:t>
+            </a:r>
+          </a:p>
+        </p:txBody>
+      </p:sp>
+      <p:sp>
+        <p:nvSpPr>
+          <p:cNvPr id="7" name="TextBox 6"/>
+          <p:cNvSpPr txBox="1"/>
+          <p:nvPr/>
+        </p:nvSpPr>
+        <p:spPr>
+          <a:xfrm>
+            <a:off x="640080" y="2423160"/>
+            <a:ext cx="5212080" cy="3749039"/>
+          </a:xfrm>
+          <a:prstGeom prst="rect">
+            <a:avLst/>
+          </a:prstGeom>
+          <a:noFill/>
+        </p:spPr>
+        <p:txBody>
+          <a:bodyPr wrap="square" anchor="t" lIns="0" rIns="0" tIns="0" bIns="0">
+            <a:noAutofit/>
+          </a:bodyPr>
+          <a:lstStyle/>
+          <a:p>
+            <a:pPr>
+              <a:lnSpc>
+                <a:spcPct val="112000"/>
+              </a:lnSpc>
+              <a:spcAft>
+                <a:spcPts val="1000"/>
+              </a:spcAft>
+            </a:pPr>
+            <a:r>
+              <a:rPr sz="1600" b="1" i="0">
+                <a:solidFill>
+                  <a:srgbClr val="3D6D7E"/>
+                </a:solidFill>
+                <a:latin typeface="Calibri"/>
+              </a:rPr>
+              <a:t>—  </a:t>
+            </a:r>
+            <a:r>
+              <a:rPr sz="1600" b="1" i="0">
+                <a:solidFill>
+                  <a:srgbClr val="1C1E22"/>
+                </a:solidFill>
+                <a:latin typeface="Calibri"/>
+              </a:rPr>
+              <a:t>rewind-bead — </a:t>
+            </a:r>
+            <a:r>
+              <a:rPr sz="1600" b="0" i="0">
+                <a:solidFill>
+                  <a:srgbClr val="1C1E22"/>
+                </a:solidFill>
+                <a:latin typeface="Calibri"/>
+              </a:rPr>
+              <a:t>the sanctioned path for any per-bead escalation. Resets to REFINE_TESTS_WRITE cycle 1, stubs impl files, fresh attempt budget. Always discards whatever implementation exists on disk. Refuses a succeeded bead.</a:t>
+            </a:r>
+          </a:p>
+          <a:p>
+            <a:pPr>
+              <a:lnSpc>
+                <a:spcPct val="112000"/>
+              </a:lnSpc>
+              <a:spcAft>
+                <a:spcPts val="1000"/>
+              </a:spcAft>
+            </a:pPr>
+            <a:r>
+              <a:rPr sz="1600" b="1" i="0">
+                <a:solidFill>
+                  <a:srgbClr val="3D6D7E"/>
+                </a:solidFill>
+                <a:latin typeface="Calibri"/>
+              </a:rPr>
+              <a:t>—  </a:t>
+            </a:r>
+            <a:r>
+              <a:rPr sz="1600" b="1" i="0">
+                <a:solidFill>
+                  <a:srgbClr val="1C1E22"/>
+                </a:solidFill>
+                <a:latin typeface="Calibri"/>
+              </a:rPr>
+              <a:t>Requeue (UI) — </a:t>
+            </a:r>
+            <a:r>
+              <a:rPr sz="1600" b="0" i="0">
+                <a:solidFill>
+                  <a:srgbClr val="1C1E22"/>
+                </a:solidFill>
+                <a:latin typeface="Calibri"/>
+              </a:rPr>
+              <a:t>try the exact same job again. Useful for transient failures, not a spec problem.</a:t>
+            </a:r>
+          </a:p>
+        </p:txBody>
+      </p:sp>
+      <p:sp>
+        <p:nvSpPr>
+          <p:cNvPr id="8" name="TextBox 7"/>
+          <p:cNvSpPr txBox="1"/>
+          <p:nvPr/>
+        </p:nvSpPr>
+        <p:spPr>
+          <a:xfrm>
+            <a:off x="6309360" y="1965960"/>
+            <a:ext cx="5212080" cy="365760"/>
+          </a:xfrm>
+          <a:prstGeom prst="rect">
+            <a:avLst/>
+          </a:prstGeom>
+          <a:noFill/>
+        </p:spPr>
+        <p:txBody>
+          <a:bodyPr wrap="square" anchor="t" lIns="0" rIns="0" tIns="0" bIns="0">
+            <a:noAutofit/>
+          </a:bodyPr>
+          <a:lstStyle/>
+          <a:p>
+            <a:r>
+              <a:rPr sz="1500" b="1" i="0">
+                <a:solidFill>
+                  <a:srgbClr val="3D6D7E"/>
+                </a:solidFill>
+                <a:latin typeface="Consolas"/>
+              </a:rPr>
+              <a:t>PROJECT-LEVEL</a:t>
+            </a:r>
+          </a:p>
+        </p:txBody>
+      </p:sp>
+      <p:sp>
+        <p:nvSpPr>
+          <p:cNvPr id="9" name="TextBox 8"/>
+          <p:cNvSpPr txBox="1"/>
+          <p:nvPr/>
+        </p:nvSpPr>
+        <p:spPr>
+          <a:xfrm>
+            <a:off x="6309360" y="2423160"/>
+            <a:ext cx="5212080" cy="3749039"/>
+          </a:xfrm>
+          <a:prstGeom prst="rect">
+            <a:avLst/>
+          </a:prstGeom>
+          <a:noFill/>
+        </p:spPr>
+        <p:txBody>
+          <a:bodyPr wrap="square" anchor="t" lIns="0" rIns="0" tIns="0" bIns="0">
+            <a:noAutofit/>
+          </a:bodyPr>
+          <a:lstStyle/>
+          <a:p>
+            <a:pPr>
+              <a:lnSpc>
+                <a:spcPct val="112000"/>
+              </a:lnSpc>
+              <a:spcAft>
+                <a:spcPts val="1000"/>
+              </a:spcAft>
+            </a:pPr>
+            <a:r>
+              <a:rPr sz="1600" b="1" i="0">
+                <a:solidFill>
+                  <a:srgbClr val="3D6D7E"/>
+                </a:solidFill>
+                <a:latin typeface="Calibri"/>
+              </a:rPr>
+              <a:t>—  </a:t>
+            </a:r>
+            <a:r>
+              <a:rPr sz="1600" b="1" i="0">
+                <a:solidFill>
+                  <a:srgbClr val="1C1E22"/>
+                </a:solidFill>
+                <a:latin typeface="Calibri"/>
+              </a:rPr>
+              <a:t>resume-project — </a:t>
+            </a:r>
+            <a:r>
+              <a:rPr sz="1600" b="0" i="0">
+                <a:solidFill>
+                  <a:srgbClr val="1C1E22"/>
+                </a:solidFill>
+                <a:latin typeface="Calibri"/>
+              </a:rPr>
+              <a:t>pure status flip; only ever re-dispatches bead 1, or for a cascade project, re-enters at DECOMPOSITION_APPROVED.</a:t>
+            </a:r>
+          </a:p>
+          <a:p>
+            <a:pPr>
+              <a:lnSpc>
+                <a:spcPct val="112000"/>
+              </a:lnSpc>
+              <a:spcAft>
+                <a:spcPts val="1000"/>
+              </a:spcAft>
+            </a:pPr>
+            <a:r>
+              <a:rPr sz="1600" b="1" i="0">
+                <a:solidFill>
+                  <a:srgbClr val="3D6D7E"/>
+                </a:solidFill>
+                <a:latin typeface="Calibri"/>
+              </a:rPr>
+              <a:t>—  </a:t>
+            </a:r>
+            <a:r>
+              <a:rPr sz="1600" b="1" i="0">
+                <a:solidFill>
+                  <a:srgbClr val="1C1E22"/>
+                </a:solidFill>
+                <a:latin typeface="Calibri"/>
+              </a:rPr>
+              <a:t>full-stop-project — </a:t>
+            </a:r>
+            <a:r>
+              <a:rPr sz="1600" b="0" i="0">
+                <a:solidFill>
+                  <a:srgbClr val="1C1E22"/>
+                </a:solidFill>
+                <a:latin typeface="Calibri"/>
+              </a:rPr>
+              <a:t>the manual equivalent of a project-wide escalation.</a:t>
+            </a:r>
+          </a:p>
+          <a:p>
+            <a:pPr>
+              <a:lnSpc>
+                <a:spcPct val="112000"/>
+              </a:lnSpc>
+              <a:spcAft>
+                <a:spcPts val="1000"/>
+              </a:spcAft>
+            </a:pPr>
+            <a:r>
+              <a:rPr sz="1600" b="1" i="0">
+                <a:solidFill>
+                  <a:srgbClr val="3D6D7E"/>
+                </a:solidFill>
+                <a:latin typeface="Calibri"/>
+              </a:rPr>
+              <a:t>—  </a:t>
+            </a:r>
+            <a:r>
+              <a:rPr sz="1600" b="1" i="0">
+                <a:solidFill>
+                  <a:srgbClr val="1C1E22"/>
+                </a:solidFill>
+                <a:latin typeface="Calibri"/>
+              </a:rPr>
+              <a:t>Never: </a:t>
+            </a:r>
+            <a:r>
+              <a:rPr sz="1600" b="0" i="0">
+                <a:solidFill>
+                  <a:srgbClr val="1C1E22"/>
+                </a:solidFill>
+                <a:latin typeface="Calibri"/>
+              </a:rPr>
+              <a:t>hand-editing the database, or patching a test to force it green — convention, not code, but held.</a:t>
+            </a:r>
+          </a:p>
+        </p:txBody>
+      </p:sp>
+      <p:cxnSp>
+        <p:nvCxnSpPr>
+          <p:cNvPr id="10" name="Connector 9"/>
+          <p:cNvCxnSpPr/>
+          <p:nvPr/>
+        </p:nvCxnSpPr>
+        <p:spPr>
+          <a:xfrm>
+            <a:off x="6035040" y="1965960"/>
+            <a:ext cx="0" cy="4251960"/>
+          </a:xfrm>
+          <a:prstGeom prst="line">
+            <a:avLst/>
+          </a:prstGeom>
+          <a:ln w="12700">
+            <a:solidFill>
+              <a:srgbClr val="E2E0DA"/>
+            </a:solidFill>
+          </a:ln>
+        </p:spPr>
+        <p:style>
+          <a:lnRef idx="2">
+            <a:schemeClr val="accent1"/>
+          </a:lnRef>
+          <a:fillRef idx="0">
+            <a:schemeClr val="accent1"/>
+          </a:fillRef>
+          <a:effectRef idx="1">
+            <a:schemeClr val="accent1"/>
+          </a:effectRef>
+          <a:fontRef idx="minor">
+            <a:schemeClr val="tx1"/>
+          </a:fontRef>
+        </p:style>
+      </p:cxnSp>
+      <p:sp>
+        <p:nvSpPr>
+          <p:cNvPr id="11" name="TextBox 10"/>
+          <p:cNvSpPr txBox="1"/>
+          <p:nvPr/>
+        </p:nvSpPr>
+        <p:spPr>
+          <a:xfrm>
+            <a:off x="640080" y="6473952"/>
+            <a:ext cx="10881360" cy="292608"/>
+          </a:xfrm>
+          <a:prstGeom prst="rect">
+            <a:avLst/>
+          </a:prstGeom>
+          <a:noFill/>
+        </p:spPr>
+        <p:txBody>
+          <a:bodyPr wrap="square" anchor="t" lIns="0" rIns="0" tIns="0" bIns="0">
+            <a:noAutofit/>
+          </a:bodyPr>
+          <a:lstStyle/>
+          <a:p>
+            <a:pPr algn="l"/>
+            <a:r>
+              <a:rPr sz="1000" b="0" i="0">
+                <a:solidFill>
+                  <a:srgbClr val="5F636B"/>
+                </a:solidFill>
+                <a:latin typeface="Consolas"/>
+              </a:rPr>
+              <a:t>RATCHET · STATE MACHINE REFERENCE</a:t>
+            </a:r>
+          </a:p>
+          <a:p/>
+        </p:txBody>
+      </p:sp>
+      <p:sp>
+        <p:nvSpPr>
+          <p:cNvPr id="12" name="TextBox 11"/>
+          <p:cNvSpPr txBox="1"/>
+          <p:nvPr/>
+        </p:nvSpPr>
+        <p:spPr>
+          <a:xfrm>
+            <a:off x="10881360" y="6473952"/>
+            <a:ext cx="640080" cy="292608"/>
+          </a:xfrm>
+          <a:prstGeom prst="rect">
+            <a:avLst/>
+          </a:prstGeom>
+          <a:noFill/>
+        </p:spPr>
+        <p:txBody>
+          <a:bodyPr wrap="square" anchor="t" lIns="0" rIns="0" tIns="0" bIns="0">
+            <a:noAutofit/>
+          </a:bodyPr>
+          <a:lstStyle/>
+          <a:p>
+            <a:pPr algn="r"/>
+            <a:r>
+              <a:rPr sz="1000" b="0" i="0">
+                <a:solidFill>
+                  <a:srgbClr val="5F636B"/>
+                </a:solidFill>
+                <a:latin typeface="Consolas"/>
+              </a:rPr>
+              <a:t>16 / 17</a:t>
+            </a:r>
+          </a:p>
+        </p:txBody>
+      </p:sp>
+      <p:cxnSp>
+        <p:nvCxnSpPr>
+          <p:cNvPr id="13" name="Connector 12"/>
+          <p:cNvCxnSpPr/>
+          <p:nvPr/>
+        </p:nvCxnSpPr>
+        <p:spPr>
+          <a:xfrm>
+            <a:off x="640080" y="6400800"/>
+            <a:ext cx="10881360" cy="0"/>
+          </a:xfrm>
+          <a:prstGeom prst="line">
+            <a:avLst/>
+          </a:prstGeom>
+          <a:ln w="12700">
+            <a:solidFill>
+              <a:srgbClr val="E2E0DA"/>
+            </a:solidFill>
+          </a:ln>
+        </p:spPr>
+        <p:style>
+          <a:lnRef idx="2">
+            <a:schemeClr val="accent1"/>
+          </a:lnRef>
+          <a:fillRef idx="0">
+            <a:schemeClr val="accent1"/>
+          </a:fillRef>
+          <a:effectRef idx="1">
+            <a:schemeClr val="accent1"/>
+          </a:effectRef>
+          <a:fontRef idx="minor">
+            <a:schemeClr val="tx1"/>
+          </a:fontRef>
+        </p:style>
+      </p:cxnSp>
+    </p:spTree>
+  </p:cSld>
+  <p:clrMapOvr>
+    <a:masterClrMapping/>
+  </p:clrMapOvr>
+</p:sld>
+</file>
+
+<file path=ppt/slides/slide17.xml><?xml version="1.0" encoding="utf-8"?>
+<p:sld xmlns:a="http://schemas.openxmlformats.org/drawingml/2006/main" xmlns:p="http://schemas.openxmlformats.org/presentationml/2006/main" xmlns:r="http://schemas.openxmlformats.org/officeDocument/2006/relationships">
+  <p:cSld>
+    <p:spTree>
+      <p:nvGrpSpPr>
+        <p:cNvPr id="1" name=""/>
+        <p:cNvGrpSpPr/>
+        <p:nvPr/>
+      </p:nvGrpSpPr>
+      <p:grpSpPr/>
+      <p:sp>
+        <p:nvSpPr>
+          <p:cNvPr id="2" name="Rectangle 1"/>
+          <p:cNvSpPr/>
+          <p:nvPr/>
+        </p:nvSpPr>
+        <p:spPr>
+          <a:xfrm>
+            <a:off x="0" y="0"/>
+            <a:ext cx="12191695" cy="6858000"/>
+          </a:xfrm>
+          <a:prstGeom prst="rect">
+            <a:avLst/>
+          </a:prstGeom>
+          <a:solidFill>
             <a:srgbClr val="1C1E22"/>
           </a:solidFill>
           <a:ln>
@@ -8259,7 +8661,7 @@
                 </a:solidFill>
                 <a:latin typeface="Consolas"/>
               </a:rPr>
-              <a:t>16 / 16</a:t>
+              <a:t>17 / 17</a:t>
             </a:r>
           </a:p>
         </p:txBody>
@@ -8671,7 +9073,7 @@
                 </a:solidFill>
                 <a:latin typeface="Consolas"/>
               </a:rPr>
-              <a:t>02 / 16</a:t>
+              <a:t>02 / 17</a:t>
             </a:r>
           </a:p>
         </p:txBody>
@@ -8981,7 +9383,7 @@
                 </a:solidFill>
                 <a:latin typeface="Consolas"/>
               </a:rPr>
-              <a:t>03 / 16</a:t>
+              <a:t>03 / 17</a:t>
             </a:r>
           </a:p>
         </p:txBody>
@@ -10277,7 +10679,7 @@
                 </a:solidFill>
                 <a:latin typeface="Calibri"/>
               </a:rPr>
-              <a:t>paused can also reach fixture directly </a:t>
+              <a:t>"pause knob" is one of three triggers: </a:t>
             </a:r>
             <a:r>
               <a:rPr sz="1600" b="0" i="0">
@@ -10286,7 +10688,7 @@
                 </a:solidFill>
                 <a:latin typeface="Calibri"/>
               </a:rPr>
-              <a:t>(save-fixture CLI) — the paused project's inert pending job moves with it. Omitted above for diagram clarity.</a:t>
+              <a:t>pause_after_reconcile, pause_after_verb, or pause_after_bead_id (see docs/fixtures.md). paused can also reach fixture directly via save-fixture CLI — both omitted above for clarity.</a:t>
             </a:r>
           </a:p>
         </p:txBody>
@@ -10357,7 +10759,7 @@
                 </a:solidFill>
                 <a:latin typeface="Consolas"/>
               </a:rPr>
-              <a:t>04 / 16</a:t>
+              <a:t>04 / 17</a:t>
             </a:r>
           </a:p>
         </p:txBody>
@@ -10667,7 +11069,7 @@
                 </a:solidFill>
                 <a:latin typeface="Consolas"/>
               </a:rPr>
-              <a:t>05 / 16</a:t>
+              <a:t>05 / 17</a:t>
             </a:r>
           </a:p>
         </p:txBody>
@@ -12587,7 +12989,7 @@
                 </a:solidFill>
                 <a:latin typeface="Consolas"/>
               </a:rPr>
-              <a:t>06 / 16</a:t>
+              <a:t>06 / 17</a:t>
             </a:r>
           </a:p>
         </p:txBody>
@@ -12897,7 +13299,7 @@
                 </a:solidFill>
                 <a:latin typeface="Consolas"/>
               </a:rPr>
-              <a:t>07 / 16</a:t>
+              <a:t>07 / 17</a:t>
             </a:r>
           </a:p>
         </p:txBody>
@@ -14912,7 +15314,7 @@
                 </a:solidFill>
                 <a:latin typeface="Consolas"/>
               </a:rPr>
-              <a:t>08 / 16</a:t>
+              <a:t>08 / 17</a:t>
             </a:r>
           </a:p>
         </p:txBody>
@@ -15359,7 +15761,7 @@
                 </a:solidFill>
                 <a:latin typeface="Consolas"/>
               </a:rPr>
-              <a:t>09 / 16</a:t>
+              <a:t>09 / 17</a:t>
             </a:r>
           </a:p>
         </p:txBody>
